--- a/class/cloud_infra_mgmt/01주차_클라우드개념_Docker입문/01_강의자료/1차시_클라우드패러다임과가상화이론_강의용.pptx
+++ b/class/cloud_infra_mgmt/01주차_클라우드개념_Docker입문/01_강의자료/1차시_클라우드패러다임과가상화이론_강의용.pptx
@@ -12056,7 +12056,7 @@
         </p:nvSpPr>
         <p:spPr>
           <a:xfrm>
-            <a:off x="640080" y="1828800"/>
+            <a:off x="1177747" y="1828800"/>
             <a:ext cx="2044598" cy="3108960"/>
           </a:xfrm>
           <a:prstGeom prst="roundRect">
@@ -12102,7 +12102,7 @@
         </p:nvSpPr>
         <p:spPr>
           <a:xfrm>
-            <a:off x="640080" y="1828800"/>
+            <a:off x="1177747" y="1828800"/>
             <a:ext cx="2044598" cy="109728"/>
           </a:xfrm>
           <a:prstGeom prst="rect">
@@ -12146,7 +12146,7 @@
         </p:nvSpPr>
         <p:spPr>
           <a:xfrm>
-            <a:off x="777240" y="2148840"/>
+            <a:off x="1314907" y="2148840"/>
             <a:ext cx="1770278" cy="640080"/>
           </a:xfrm>
           <a:prstGeom prst="rect">
@@ -12172,7 +12172,7 @@
                 </a:solidFill>
                 <a:latin typeface="맑은 고딕"/>
               </a:rPr>
-              <a:t>① 사전 학습</a:t>
+              <a:t>① 개념 설명</a:t>
             </a:r>
           </a:p>
         </p:txBody>
@@ -12185,7 +12185,7 @@
         </p:nvSpPr>
         <p:spPr>
           <a:xfrm>
-            <a:off x="777240" y="2834640"/>
+            <a:off x="1314907" y="2834640"/>
             <a:ext cx="1770278" cy="548640"/>
           </a:xfrm>
           <a:prstGeom prst="rect">
@@ -12211,7 +12211,7 @@
                 </a:solidFill>
                 <a:latin typeface="맑은 고딕"/>
               </a:rPr>
-              <a:t>15~20분</a:t>
+              <a:t>25분</a:t>
             </a:r>
           </a:p>
         </p:txBody>
@@ -12224,7 +12224,7 @@
         </p:nvSpPr>
         <p:spPr>
           <a:xfrm>
-            <a:off x="777240" y="3566160"/>
+            <a:off x="1314907" y="3566160"/>
             <a:ext cx="1770278" cy="1188720"/>
           </a:xfrm>
           <a:prstGeom prst="rect">
@@ -12250,7 +12250,7 @@
                 </a:solidFill>
                 <a:latin typeface="맑은 고딕"/>
               </a:rPr>
-              <a:t>개념 이해 영상 시청</a:t>
+              <a:t>강의자료 기반 직접 강의</a:t>
             </a:r>
           </a:p>
         </p:txBody>
@@ -12263,7 +12263,7 @@
         </p:nvSpPr>
         <p:spPr>
           <a:xfrm>
-            <a:off x="2712110" y="3273552"/>
+            <a:off x="3430828" y="3273552"/>
             <a:ext cx="128016" cy="219456"/>
           </a:xfrm>
           <a:prstGeom prst="chevron">
@@ -12307,7 +12307,7 @@
         </p:nvSpPr>
         <p:spPr>
           <a:xfrm>
-            <a:off x="2849270" y="1828800"/>
+            <a:off x="3763670" y="1828800"/>
             <a:ext cx="2044598" cy="3108960"/>
           </a:xfrm>
           <a:prstGeom prst="roundRect">
@@ -12353,7 +12353,7 @@
         </p:nvSpPr>
         <p:spPr>
           <a:xfrm>
-            <a:off x="2849270" y="1828800"/>
+            <a:off x="3763670" y="1828800"/>
             <a:ext cx="2044598" cy="109728"/>
           </a:xfrm>
           <a:prstGeom prst="rect">
@@ -12397,7 +12397,7 @@
         </p:nvSpPr>
         <p:spPr>
           <a:xfrm>
-            <a:off x="2986430" y="2148840"/>
+            <a:off x="3900830" y="2148840"/>
             <a:ext cx="1770278" cy="640080"/>
           </a:xfrm>
           <a:prstGeom prst="rect">
@@ -12423,7 +12423,7 @@
                 </a:solidFill>
                 <a:latin typeface="맑은 고딕"/>
               </a:rPr>
-              <a:t>② 교수자 시연</a:t>
+              <a:t>② Killercoda 따라하기</a:t>
             </a:r>
           </a:p>
         </p:txBody>
@@ -12436,7 +12436,7 @@
         </p:nvSpPr>
         <p:spPr>
           <a:xfrm>
-            <a:off x="2986430" y="2834640"/>
+            <a:off x="3900830" y="2834640"/>
             <a:ext cx="1770278" cy="548640"/>
           </a:xfrm>
           <a:prstGeom prst="rect">
@@ -12462,7 +12462,7 @@
                 </a:solidFill>
                 <a:latin typeface="맑은 고딕"/>
               </a:rPr>
-              <a:t>10분</a:t>
+              <a:t>15분</a:t>
             </a:r>
           </a:p>
         </p:txBody>
@@ -12475,7 +12475,7 @@
         </p:nvSpPr>
         <p:spPr>
           <a:xfrm>
-            <a:off x="2986430" y="3566160"/>
+            <a:off x="3900830" y="3566160"/>
             <a:ext cx="1770278" cy="1188720"/>
           </a:xfrm>
           <a:prstGeom prst="rect">
@@ -12501,7 +12501,7 @@
                 </a:solidFill>
                 <a:latin typeface="맑은 고딕"/>
               </a:rPr>
-              <a:t>이 자료로 화면 시연</a:t>
+              <a:t>hello-world 실습</a:t>
             </a:r>
           </a:p>
         </p:txBody>
@@ -12514,7 +12514,7 @@
         </p:nvSpPr>
         <p:spPr>
           <a:xfrm>
-            <a:off x="4921300" y="3273552"/>
+            <a:off x="6016752" y="3273552"/>
             <a:ext cx="128016" cy="219456"/>
           </a:xfrm>
           <a:prstGeom prst="chevron">
@@ -12558,7 +12558,7 @@
         </p:nvSpPr>
         <p:spPr>
           <a:xfrm>
-            <a:off x="5058460" y="1828800"/>
+            <a:off x="6349593" y="1828800"/>
             <a:ext cx="2044598" cy="3108960"/>
           </a:xfrm>
           <a:prstGeom prst="roundRect">
@@ -12604,7 +12604,7 @@
         </p:nvSpPr>
         <p:spPr>
           <a:xfrm>
-            <a:off x="5058460" y="1828800"/>
+            <a:off x="6349593" y="1828800"/>
             <a:ext cx="2044598" cy="109728"/>
           </a:xfrm>
           <a:prstGeom prst="rect">
@@ -12648,7 +12648,7 @@
         </p:nvSpPr>
         <p:spPr>
           <a:xfrm>
-            <a:off x="5195620" y="2148840"/>
+            <a:off x="6486753" y="2148840"/>
             <a:ext cx="1770278" cy="640080"/>
           </a:xfrm>
           <a:prstGeom prst="rect">
@@ -12674,7 +12674,7 @@
                 </a:solidFill>
                 <a:latin typeface="맑은 고딕"/>
               </a:rPr>
-              <a:t>③ Killercoda 따라하기</a:t>
+              <a:t>③ VM 과제 안내</a:t>
             </a:r>
           </a:p>
         </p:txBody>
@@ -12687,7 +12687,7 @@
         </p:nvSpPr>
         <p:spPr>
           <a:xfrm>
-            <a:off x="5195620" y="2834640"/>
+            <a:off x="6486753" y="2834640"/>
             <a:ext cx="1770278" cy="548640"/>
           </a:xfrm>
           <a:prstGeom prst="rect">
@@ -12713,7 +12713,7 @@
                 </a:solidFill>
                 <a:latin typeface="맑은 고딕"/>
               </a:rPr>
-              <a:t>15분</a:t>
+              <a:t>5분</a:t>
             </a:r>
           </a:p>
         </p:txBody>
@@ -12726,7 +12726,7 @@
         </p:nvSpPr>
         <p:spPr>
           <a:xfrm>
-            <a:off x="5195620" y="3566160"/>
+            <a:off x="6486753" y="3566160"/>
             <a:ext cx="1770278" cy="1188720"/>
           </a:xfrm>
           <a:prstGeom prst="rect">
@@ -12752,7 +12752,7 @@
                 </a:solidFill>
                 <a:latin typeface="맑은 고딕"/>
               </a:rPr>
-              <a:t>hello-world 실습</a:t>
+              <a:t>0주차 VM 점검</a:t>
             </a:r>
           </a:p>
         </p:txBody>
@@ -12765,7 +12765,7 @@
         </p:nvSpPr>
         <p:spPr>
           <a:xfrm>
-            <a:off x="7130490" y="3273552"/>
+            <a:off x="8602675" y="3273552"/>
             <a:ext cx="128016" cy="219456"/>
           </a:xfrm>
           <a:prstGeom prst="chevron">
@@ -12809,7 +12809,7 @@
         </p:nvSpPr>
         <p:spPr>
           <a:xfrm>
-            <a:off x="7267650" y="1828800"/>
+            <a:off x="8935516" y="1828800"/>
             <a:ext cx="2044598" cy="3108960"/>
           </a:xfrm>
           <a:prstGeom prst="roundRect">
@@ -12855,7 +12855,7 @@
         </p:nvSpPr>
         <p:spPr>
           <a:xfrm>
-            <a:off x="7267650" y="1828800"/>
+            <a:off x="8935516" y="1828800"/>
             <a:ext cx="2044598" cy="109728"/>
           </a:xfrm>
           <a:prstGeom prst="rect">
@@ -12899,7 +12899,7 @@
         </p:nvSpPr>
         <p:spPr>
           <a:xfrm>
-            <a:off x="7404810" y="2148840"/>
+            <a:off x="9072676" y="2148840"/>
             <a:ext cx="1770278" cy="640080"/>
           </a:xfrm>
           <a:prstGeom prst="rect">
@@ -12925,7 +12925,7 @@
                 </a:solidFill>
                 <a:latin typeface="맑은 고딕"/>
               </a:rPr>
-              <a:t>④ VM 과제 안내</a:t>
+              <a:t>④ 결과 제출</a:t>
             </a:r>
           </a:p>
         </p:txBody>
@@ -12938,7 +12938,7 @@
         </p:nvSpPr>
         <p:spPr>
           <a:xfrm>
-            <a:off x="7404810" y="2834640"/>
+            <a:off x="9072676" y="2834640"/>
             <a:ext cx="1770278" cy="548640"/>
           </a:xfrm>
           <a:prstGeom prst="rect">
@@ -12977,258 +12977,7 @@
         </p:nvSpPr>
         <p:spPr>
           <a:xfrm>
-            <a:off x="7404810" y="3566160"/>
-            <a:ext cx="1770278" cy="1188720"/>
-          </a:xfrm>
-          <a:prstGeom prst="rect">
-            <a:avLst/>
-          </a:prstGeom>
-          <a:noFill/>
-        </p:spPr>
-        <p:txBody>
-          <a:bodyPr wrap="square" anchor="t" lIns="0" rIns="0" tIns="0" bIns="0">
-            <a:spAutoFit/>
-          </a:bodyPr>
-          <a:lstStyle/>
-          <a:p>
-            <a:pPr algn="l">
-              <a:lnSpc>
-                <a:spcPct val="125000"/>
-              </a:lnSpc>
-            </a:pPr>
-            <a:r>
-              <a:rPr sz="1300" b="0" i="0">
-                <a:solidFill>
-                  <a:srgbClr val="5B6373"/>
-                </a:solidFill>
-                <a:latin typeface="맑은 고딕"/>
-              </a:rPr>
-              <a:t>0주차 VM 점검</a:t>
-            </a:r>
-          </a:p>
-        </p:txBody>
-      </p:sp>
-      <p:sp>
-        <p:nvSpPr>
-          <p:cNvPr id="29" name="Chevron 28"/>
-          <p:cNvSpPr/>
-          <p:nvPr/>
-        </p:nvSpPr>
-        <p:spPr>
-          <a:xfrm>
-            <a:off x="9339680" y="3273552"/>
-            <a:ext cx="128016" cy="219456"/>
-          </a:xfrm>
-          <a:prstGeom prst="chevron">
-            <a:avLst/>
-          </a:prstGeom>
-          <a:solidFill>
-            <a:srgbClr val="E3E7EE"/>
-          </a:solidFill>
-          <a:ln>
-            <a:noFill/>
-          </a:ln>
-          <a:effectLst/>
-        </p:spPr>
-        <p:style>
-          <a:lnRef idx="1">
-            <a:schemeClr val="accent1"/>
-          </a:lnRef>
-          <a:fillRef idx="3">
-            <a:schemeClr val="accent1"/>
-          </a:fillRef>
-          <a:effectRef idx="2">
-            <a:schemeClr val="accent1"/>
-          </a:effectRef>
-          <a:fontRef idx="minor">
-            <a:schemeClr val="lt1"/>
-          </a:fontRef>
-        </p:style>
-        <p:txBody>
-          <a:bodyPr rtlCol="0" anchor="ctr"/>
-          <a:lstStyle/>
-          <a:p>
-            <a:pPr algn="ctr"/>
-          </a:p>
-        </p:txBody>
-      </p:sp>
-      <p:sp>
-        <p:nvSpPr>
-          <p:cNvPr id="30" name="Rounded Rectangle 29"/>
-          <p:cNvSpPr/>
-          <p:nvPr/>
-        </p:nvSpPr>
-        <p:spPr>
-          <a:xfrm>
-            <a:off x="9476840" y="1828800"/>
-            <a:ext cx="2044598" cy="3108960"/>
-          </a:xfrm>
-          <a:prstGeom prst="roundRect">
-            <a:avLst>
-              <a:gd name="adj" fmla="val 8000"/>
-            </a:avLst>
-          </a:prstGeom>
-          <a:solidFill>
-            <a:srgbClr val="F4F6F9"/>
-          </a:solidFill>
-          <a:ln>
-            <a:noFill/>
-          </a:ln>
-          <a:effectLst/>
-        </p:spPr>
-        <p:style>
-          <a:lnRef idx="1">
-            <a:schemeClr val="accent1"/>
-          </a:lnRef>
-          <a:fillRef idx="3">
-            <a:schemeClr val="accent1"/>
-          </a:fillRef>
-          <a:effectRef idx="2">
-            <a:schemeClr val="accent1"/>
-          </a:effectRef>
-          <a:fontRef idx="minor">
-            <a:schemeClr val="lt1"/>
-          </a:fontRef>
-        </p:style>
-        <p:txBody>
-          <a:bodyPr rtlCol="0" anchor="ctr"/>
-          <a:lstStyle/>
-          <a:p>
-            <a:pPr algn="ctr"/>
-          </a:p>
-        </p:txBody>
-      </p:sp>
-      <p:sp>
-        <p:nvSpPr>
-          <p:cNvPr id="31" name="Rectangle 30"/>
-          <p:cNvSpPr/>
-          <p:nvPr/>
-        </p:nvSpPr>
-        <p:spPr>
-          <a:xfrm>
-            <a:off x="9476840" y="1828800"/>
-            <a:ext cx="2044598" cy="109728"/>
-          </a:xfrm>
-          <a:prstGeom prst="rect">
-            <a:avLst/>
-          </a:prstGeom>
-          <a:solidFill>
-            <a:srgbClr val="5B6373"/>
-          </a:solidFill>
-          <a:ln>
-            <a:noFill/>
-          </a:ln>
-          <a:effectLst/>
-        </p:spPr>
-        <p:style>
-          <a:lnRef idx="1">
-            <a:schemeClr val="accent1"/>
-          </a:lnRef>
-          <a:fillRef idx="3">
-            <a:schemeClr val="accent1"/>
-          </a:fillRef>
-          <a:effectRef idx="2">
-            <a:schemeClr val="accent1"/>
-          </a:effectRef>
-          <a:fontRef idx="minor">
-            <a:schemeClr val="lt1"/>
-          </a:fontRef>
-        </p:style>
-        <p:txBody>
-          <a:bodyPr rtlCol="0" anchor="ctr"/>
-          <a:lstStyle/>
-          <a:p>
-            <a:pPr algn="ctr"/>
-          </a:p>
-        </p:txBody>
-      </p:sp>
-      <p:sp>
-        <p:nvSpPr>
-          <p:cNvPr id="32" name="TextBox 31"/>
-          <p:cNvSpPr txBox="1"/>
-          <p:nvPr/>
-        </p:nvSpPr>
-        <p:spPr>
-          <a:xfrm>
-            <a:off x="9614000" y="2148840"/>
-            <a:ext cx="1770278" cy="640080"/>
-          </a:xfrm>
-          <a:prstGeom prst="rect">
-            <a:avLst/>
-          </a:prstGeom>
-          <a:noFill/>
-        </p:spPr>
-        <p:txBody>
-          <a:bodyPr wrap="square" anchor="t" lIns="0" rIns="0" tIns="0" bIns="0">
-            <a:spAutoFit/>
-          </a:bodyPr>
-          <a:lstStyle/>
-          <a:p>
-            <a:pPr algn="l">
-              <a:lnSpc>
-                <a:spcPct val="110000"/>
-              </a:lnSpc>
-            </a:pPr>
-            <a:r>
-              <a:rPr sz="1500" b="1" i="0">
-                <a:solidFill>
-                  <a:srgbClr val="14213D"/>
-                </a:solidFill>
-                <a:latin typeface="맑은 고딕"/>
-              </a:rPr>
-              <a:t>⑤ 결과 제출</a:t>
-            </a:r>
-          </a:p>
-        </p:txBody>
-      </p:sp>
-      <p:sp>
-        <p:nvSpPr>
-          <p:cNvPr id="33" name="TextBox 32"/>
-          <p:cNvSpPr txBox="1"/>
-          <p:nvPr/>
-        </p:nvSpPr>
-        <p:spPr>
-          <a:xfrm>
-            <a:off x="9614000" y="2834640"/>
-            <a:ext cx="1770278" cy="548640"/>
-          </a:xfrm>
-          <a:prstGeom prst="rect">
-            <a:avLst/>
-          </a:prstGeom>
-          <a:noFill/>
-        </p:spPr>
-        <p:txBody>
-          <a:bodyPr wrap="square" anchor="t" lIns="0" rIns="0" tIns="0" bIns="0">
-            <a:spAutoFit/>
-          </a:bodyPr>
-          <a:lstStyle/>
-          <a:p>
-            <a:pPr algn="l">
-              <a:lnSpc>
-                <a:spcPct val="115000"/>
-              </a:lnSpc>
-            </a:pPr>
-            <a:r>
-              <a:rPr sz="2600" b="1" i="0">
-                <a:solidFill>
-                  <a:srgbClr val="5B6373"/>
-                </a:solidFill>
-                <a:latin typeface="맑은 고딕"/>
-              </a:rPr>
-              <a:t>5분</a:t>
-            </a:r>
-          </a:p>
-        </p:txBody>
-      </p:sp>
-      <p:sp>
-        <p:nvSpPr>
-          <p:cNvPr id="34" name="TextBox 33"/>
-          <p:cNvSpPr txBox="1"/>
-          <p:nvPr/>
-        </p:nvSpPr>
-        <p:spPr>
-          <a:xfrm>
-            <a:off x="9614000" y="3566160"/>
+            <a:off x="9072676" y="3566160"/>
             <a:ext cx="1770278" cy="1188720"/>
           </a:xfrm>
           <a:prstGeom prst="rect">

--- a/class/cloud_infra_mgmt/01주차_클라우드개념_Docker입문/01_강의자료/1차시_클라우드패러다임과가상화이론_강의용.pptx
+++ b/class/cloud_infra_mgmt/01주차_클라우드개념_Docker입문/01_강의자료/1차시_클라우드패러다임과가상화이론_강의용.pptx
@@ -23,6 +23,7 @@
     <p:sldId id="271" r:id="rId23"/>
     <p:sldId id="272" r:id="rId24"/>
     <p:sldId id="273" r:id="rId25"/>
+    <p:sldId id="274" r:id="rId26"/>
   </p:sldIdLst>
   <p:sldSz cx="12191695" cy="6858000" type="screen4x3"/>
   <p:notesSz cx="6858000" cy="9144000"/>
@@ -5354,7 +5355,7 @@
                 </a:solidFill>
                 <a:latin typeface="맑은 고딕"/>
               </a:rPr>
-              <a:t>10 / 18</a:t>
+              <a:t>10 / 19</a:t>
             </a:r>
           </a:p>
         </p:txBody>
@@ -6477,7 +6478,7 @@
                 </a:solidFill>
                 <a:latin typeface="맑은 고딕"/>
               </a:rPr>
-              <a:t>12 / 18</a:t>
+              <a:t>12 / 19</a:t>
             </a:r>
           </a:p>
         </p:txBody>
@@ -8541,7 +8542,7 @@
                 </a:solidFill>
                 <a:latin typeface="맑은 고딕"/>
               </a:rPr>
-              <a:t>13 / 18</a:t>
+              <a:t>13 / 19</a:t>
             </a:r>
           </a:p>
         </p:txBody>
@@ -9297,7 +9298,7 @@
                 </a:solidFill>
                 <a:latin typeface="맑은 고딕"/>
               </a:rPr>
-              <a:t>14 / 18</a:t>
+              <a:t>14 / 19</a:t>
             </a:r>
           </a:p>
         </p:txBody>
@@ -10192,7 +10193,7 @@
                 </a:solidFill>
                 <a:latin typeface="맑은 고딕"/>
               </a:rPr>
-              <a:t>16 / 18</a:t>
+              <a:t>16 / 19</a:t>
             </a:r>
           </a:p>
         </p:txBody>
@@ -10776,7 +10777,7 @@
                 </a:solidFill>
                 <a:latin typeface="맑은 고딕"/>
               </a:rPr>
-              <a:t>17 / 18</a:t>
+              <a:t>17 / 19</a:t>
             </a:r>
           </a:p>
         </p:txBody>
@@ -10929,7 +10930,7 @@
                 </a:solidFill>
                 <a:latin typeface="맑은 고딕"/>
               </a:rPr>
-              <a:t>오늘의 정리 &amp; 다음 차시 예고</a:t>
+              <a:t>오늘의 정리</a:t>
             </a:r>
           </a:p>
         </p:txBody>
@@ -11216,6 +11217,107 @@
           </a:p>
         </p:txBody>
       </p:sp>
+    </p:spTree>
+  </p:cSld>
+  <p:clrMapOvr>
+    <a:masterClrMapping/>
+  </p:clrMapOvr>
+</p:sld>
+</file>
+
+<file path=ppt/slides/slide19.xml><?xml version="1.0" encoding="utf-8"?>
+<p:sld xmlns:a="http://schemas.openxmlformats.org/drawingml/2006/main" xmlns:p="http://schemas.openxmlformats.org/presentationml/2006/main" xmlns:r="http://schemas.openxmlformats.org/officeDocument/2006/relationships">
+  <p:cSld>
+    <p:spTree>
+      <p:nvGrpSpPr>
+        <p:cNvPr id="1" name=""/>
+        <p:cNvGrpSpPr/>
+        <p:nvPr/>
+      </p:nvGrpSpPr>
+      <p:grpSpPr/>
+      <p:sp>
+        <p:nvSpPr>
+          <p:cNvPr id="2" name="Rectangle 1"/>
+          <p:cNvSpPr/>
+          <p:nvPr/>
+        </p:nvSpPr>
+        <p:spPr>
+          <a:xfrm>
+            <a:off x="0" y="0"/>
+            <a:ext cx="164592" cy="6858000"/>
+          </a:xfrm>
+          <a:prstGeom prst="rect">
+            <a:avLst/>
+          </a:prstGeom>
+          <a:solidFill>
+            <a:srgbClr val="14B8A6"/>
+          </a:solidFill>
+          <a:ln>
+            <a:noFill/>
+          </a:ln>
+          <a:effectLst/>
+        </p:spPr>
+        <p:style>
+          <a:lnRef idx="1">
+            <a:schemeClr val="accent1"/>
+          </a:lnRef>
+          <a:fillRef idx="3">
+            <a:schemeClr val="accent1"/>
+          </a:fillRef>
+          <a:effectRef idx="2">
+            <a:schemeClr val="accent1"/>
+          </a:effectRef>
+          <a:fontRef idx="minor">
+            <a:schemeClr val="lt1"/>
+          </a:fontRef>
+        </p:style>
+        <p:txBody>
+          <a:bodyPr rtlCol="0" anchor="ctr"/>
+          <a:lstStyle/>
+          <a:p>
+            <a:pPr algn="ctr"/>
+          </a:p>
+        </p:txBody>
+      </p:sp>
+      <p:sp>
+        <p:nvSpPr>
+          <p:cNvPr id="3" name="TextBox 2"/>
+          <p:cNvSpPr txBox="1"/>
+          <p:nvPr/>
+        </p:nvSpPr>
+        <p:spPr>
+          <a:xfrm>
+            <a:off x="822960" y="640080"/>
+            <a:ext cx="10058400" cy="548640"/>
+          </a:xfrm>
+          <a:prstGeom prst="rect">
+            <a:avLst/>
+          </a:prstGeom>
+          <a:noFill/>
+        </p:spPr>
+        <p:txBody>
+          <a:bodyPr wrap="square" anchor="t" lIns="0" rIns="0" tIns="0" bIns="0">
+            <a:spAutoFit/>
+          </a:bodyPr>
+          <a:lstStyle/>
+          <a:p>
+            <a:pPr algn="l">
+              <a:lnSpc>
+                <a:spcPct val="115000"/>
+              </a:lnSpc>
+            </a:pPr>
+            <a:r>
+              <a:rPr sz="2800" b="1" i="0">
+                <a:solidFill>
+                  <a:srgbClr val="FFFFFF"/>
+                </a:solidFill>
+                <a:latin typeface="맑은 고딕"/>
+              </a:rPr>
+              <a:t>다음 차시 예고</a:t>
+            </a:r>
+          </a:p>
+        </p:txBody>
+      </p:sp>
       <p:sp>
         <p:nvSpPr>
           <p:cNvPr id="10" name="Rounded Rectangle 9"/>
@@ -11224,7 +11326,7 @@
         </p:nvSpPr>
         <p:spPr>
           <a:xfrm>
-            <a:off x="822960" y="4251960"/>
+            <a:off x="822960" y="1645920"/>
             <a:ext cx="10332720" cy="1371600"/>
           </a:xfrm>
           <a:prstGeom prst="roundRect">
@@ -11270,7 +11372,7 @@
         </p:nvSpPr>
         <p:spPr>
           <a:xfrm>
-            <a:off x="1051560" y="4434840"/>
+            <a:off x="1051560" y="1828800"/>
             <a:ext cx="9875520" cy="365760"/>
           </a:xfrm>
           <a:prstGeom prst="rect">
@@ -11309,7 +11411,7 @@
         </p:nvSpPr>
         <p:spPr>
           <a:xfrm>
-            <a:off x="1051560" y="4800600"/>
+            <a:off x="1051560" y="2194560"/>
             <a:ext cx="9875520" cy="731520"/>
           </a:xfrm>
           <a:prstGeom prst="rect">
@@ -11336,45 +11438,6 @@
                 <a:latin typeface="맑은 고딕"/>
               </a:rPr>
               <a:t>Docker 컨테이너 생명주기와 데이터 보존 (볼륨 마운트로 웹 서버 직접 띄워보기)</a:t>
-            </a:r>
-          </a:p>
-        </p:txBody>
-      </p:sp>
-      <p:sp>
-        <p:nvSpPr>
-          <p:cNvPr id="13" name="TextBox 12"/>
-          <p:cNvSpPr txBox="1"/>
-          <p:nvPr/>
-        </p:nvSpPr>
-        <p:spPr>
-          <a:xfrm>
-            <a:off x="822960" y="5989320"/>
-            <a:ext cx="10058400" cy="457200"/>
-          </a:xfrm>
-          <a:prstGeom prst="rect">
-            <a:avLst/>
-          </a:prstGeom>
-          <a:noFill/>
-        </p:spPr>
-        <p:txBody>
-          <a:bodyPr wrap="square" anchor="t" lIns="0" rIns="0" tIns="0" bIns="0">
-            <a:spAutoFit/>
-          </a:bodyPr>
-          <a:lstStyle/>
-          <a:p>
-            <a:pPr algn="l">
-              <a:lnSpc>
-                <a:spcPct val="115000"/>
-              </a:lnSpc>
-            </a:pPr>
-            <a:r>
-              <a:rPr sz="1300" b="0" i="0">
-                <a:solidFill>
-                  <a:srgbClr val="C9D3E6"/>
-                </a:solidFill>
-                <a:latin typeface="맑은 고딕"/>
-              </a:rPr>
-              <a:t>Q&amp;A 및 문의  ·  LMS Q&amp;A 게시판 (48시간 내 답변)</a:t>
             </a:r>
           </a:p>
         </p:txBody>
@@ -11807,7 +11870,7 @@
                 </a:solidFill>
                 <a:latin typeface="맑은 고딕"/>
               </a:rPr>
-              <a:t>02 / 18</a:t>
+              <a:t>02 / 19</a:t>
             </a:r>
           </a:p>
         </p:txBody>
@@ -13081,7 +13144,7 @@
                 </a:solidFill>
                 <a:latin typeface="맑은 고딕"/>
               </a:rPr>
-              <a:t>03 / 18</a:t>
+              <a:t>03 / 19</a:t>
             </a:r>
           </a:p>
         </p:txBody>
@@ -13788,7 +13851,7 @@
                 </a:solidFill>
                 <a:latin typeface="맑은 고딕"/>
               </a:rPr>
-              <a:t>05 / 18</a:t>
+              <a:t>05 / 19</a:t>
             </a:r>
           </a:p>
         </p:txBody>
@@ -14348,7 +14411,7 @@
                 </a:solidFill>
                 <a:latin typeface="맑은 고딕"/>
               </a:rPr>
-              <a:t>06 / 18</a:t>
+              <a:t>06 / 19</a:t>
             </a:r>
           </a:p>
         </p:txBody>
@@ -16169,7 +16232,7 @@
                 </a:solidFill>
                 <a:latin typeface="맑은 고딕"/>
               </a:rPr>
-              <a:t>07 / 18</a:t>
+              <a:t>07 / 19</a:t>
             </a:r>
           </a:p>
         </p:txBody>
@@ -17292,7 +17355,7 @@
                 </a:solidFill>
                 <a:latin typeface="맑은 고딕"/>
               </a:rPr>
-              <a:t>09 / 18</a:t>
+              <a:t>09 / 19</a:t>
             </a:r>
           </a:p>
         </p:txBody>

--- a/class/cloud_infra_mgmt/01주차_클라우드개념_Docker입문/01_강의자료/1차시_클라우드패러다임과가상화이론_강의용.pptx
+++ b/class/cloud_infra_mgmt/01주차_클라우드개념_Docker입문/01_강의자료/1차시_클라우드패러다임과가상화이론_강의용.pptx
@@ -10594,34 +10594,6 @@
               <a:t>git --version 정상 출력 확인</a:t>
             </a:r>
           </a:p>
-          <a:p>
-            <a:pPr marL="0" indent="0">
-              <a:lnSpc>
-                <a:spcPct val="130000"/>
-              </a:lnSpc>
-              <a:spcAft>
-                <a:spcPts val="1600"/>
-              </a:spcAft>
-            </a:pPr>
-            <a:r>
-              <a:rPr sz="1700" b="1">
-                <a:solidFill>
-                  <a:srgbClr val="0D9488"/>
-                </a:solidFill>
-                <a:latin typeface="맑은 고딕"/>
-              </a:rPr>
-              <a:t>●  </a:t>
-            </a:r>
-            <a:r>
-              <a:rPr sz="1700" b="0">
-                <a:solidFill>
-                  <a:srgbClr val="222733"/>
-                </a:solidFill>
-                <a:latin typeface="맑은 고딕"/>
-              </a:rPr>
-              <a:t>문제 발생 시 → 06_로컬VM_과제복습 / 07_오류FAQ 참고</a:t>
-            </a:r>
-          </a:p>
         </p:txBody>
       </p:sp>
       <p:sp>
@@ -14206,15 +14178,6 @@
               </a:spcAft>
             </a:pPr>
             <a:r>
-              <a:rPr sz="1800" b="1">
-                <a:solidFill>
-                  <a:srgbClr val="0D9488"/>
-                </a:solidFill>
-                <a:latin typeface="맑은 고딕"/>
-              </a:rPr>
-              <a:t>●  </a:t>
-            </a:r>
-            <a:r>
               <a:rPr sz="1800" b="0">
                 <a:solidFill>
                   <a:srgbClr val="222733"/>
@@ -14234,15 +14197,6 @@
               </a:spcAft>
             </a:pPr>
             <a:r>
-              <a:rPr sz="1800" b="1">
-                <a:solidFill>
-                  <a:srgbClr val="0D9488"/>
-                </a:solidFill>
-                <a:latin typeface="맑은 고딕"/>
-              </a:rPr>
-              <a:t>●  </a:t>
-            </a:r>
-            <a:r>
               <a:rPr sz="1800" b="0">
                 <a:solidFill>
                   <a:srgbClr val="222733"/>
@@ -14262,15 +14216,6 @@
               </a:spcAft>
             </a:pPr>
             <a:r>
-              <a:rPr sz="1800" b="1">
-                <a:solidFill>
-                  <a:srgbClr val="0D9488"/>
-                </a:solidFill>
-                <a:latin typeface="맑은 고딕"/>
-              </a:rPr>
-              <a:t>●  </a:t>
-            </a:r>
-            <a:r>
               <a:rPr sz="1800" b="0">
                 <a:solidFill>
                   <a:srgbClr val="222733"/>
@@ -14290,15 +14235,6 @@
               </a:spcAft>
             </a:pPr>
             <a:r>
-              <a:rPr sz="1800" b="1">
-                <a:solidFill>
-                  <a:srgbClr val="0D9488"/>
-                </a:solidFill>
-                <a:latin typeface="맑은 고딕"/>
-              </a:rPr>
-              <a:t>●  </a:t>
-            </a:r>
-            <a:r>
               <a:rPr sz="1800" b="0">
                 <a:solidFill>
                   <a:srgbClr val="222733"/>
@@ -14317,15 +14253,6 @@
                 <a:spcPts val="1600"/>
               </a:spcAft>
             </a:pPr>
-            <a:r>
-              <a:rPr sz="1800" b="1">
-                <a:solidFill>
-                  <a:srgbClr val="0D9488"/>
-                </a:solidFill>
-                <a:latin typeface="맑은 고딕"/>
-              </a:rPr>
-              <a:t>●  </a:t>
-            </a:r>
             <a:r>
               <a:rPr sz="1800" b="0">
                 <a:solidFill>

--- a/class/cloud_infra_mgmt/01주차_클라우드개념_Docker입문/01_강의자료/1차시_클라우드패러다임과가상화이론_강의용.pptx
+++ b/class/cloud_infra_mgmt/01주차_클라우드개념_Docker입문/01_강의자료/1차시_클라우드패러다임과가상화이론_강의용.pptx
@@ -5669,15 +5669,6 @@
               </a:lnSpc>
             </a:pPr>
             <a:r>
-              <a:rPr sz="2200" b="1">
-                <a:solidFill>
-                  <a:srgbClr val="0D9488"/>
-                </a:solidFill>
-                <a:latin typeface="맑은 고딕"/>
-              </a:rPr>
-              <a:t>●  </a:t>
-            </a:r>
-            <a:r>
               <a:rPr sz="2200" b="0">
                 <a:solidFill>
                   <a:srgbClr val="222733"/>
@@ -5693,15 +5684,6 @@
                 <a:spcPct val="115000"/>
               </a:lnSpc>
             </a:pPr>
-            <a:r>
-              <a:rPr sz="2200" b="1">
-                <a:solidFill>
-                  <a:srgbClr val="0D9488"/>
-                </a:solidFill>
-                <a:latin typeface="맑은 고딕"/>
-              </a:rPr>
-              <a:t>●  </a:t>
-            </a:r>
             <a:r>
               <a:rPr sz="2200" b="0">
                 <a:solidFill>
@@ -6012,54 +5994,8 @@
         </p:nvSpPr>
         <p:spPr>
           <a:xfrm>
-            <a:off x="1177747" y="1828800"/>
-            <a:ext cx="2048256" cy="3108960"/>
-          </a:xfrm>
-          <a:prstGeom prst="rect">
-            <a:avLst/>
-          </a:prstGeom>
-          <a:solidFill>
-            <a:srgbClr val="FFFFFF"/>
-          </a:solidFill>
-          <a:ln>
-            <a:solidFill>
-              <a:srgbClr val="FFFFFF"/>
-            </a:solidFill>
-          </a:ln>
-          <a:effectLst/>
-        </p:spPr>
-        <p:style>
-          <a:lnRef idx="1">
-            <a:schemeClr val="accent1"/>
-          </a:lnRef>
-          <a:fillRef idx="3">
-            <a:schemeClr val="accent1"/>
-          </a:fillRef>
-          <a:effectRef idx="2">
-            <a:schemeClr val="accent1"/>
-          </a:effectRef>
-          <a:fontRef idx="minor">
-            <a:schemeClr val="lt1"/>
-          </a:fontRef>
-        </p:style>
-        <p:txBody>
-          <a:bodyPr rtlCol="0" anchor="ctr"/>
-          <a:lstStyle/>
-          <a:p>
-            <a:pPr algn="ctr"/>
-          </a:p>
-        </p:txBody>
-      </p:sp>
-      <p:sp>
-        <p:nvSpPr>
-          <p:cNvPr id="7" name="Rectangle 6"/>
-          <p:cNvSpPr/>
-          <p:nvPr/>
-        </p:nvSpPr>
-        <p:spPr>
-          <a:xfrm>
-            <a:off x="1177747" y="1828800"/>
-            <a:ext cx="2048256" cy="109728"/>
+            <a:off x="2571292" y="1730959"/>
+            <a:ext cx="1995220" cy="31089"/>
           </a:xfrm>
           <a:prstGeom prst="rect">
             <a:avLst/>
@@ -6096,121 +6032,16 @@
       </p:sp>
       <p:sp>
         <p:nvSpPr>
-          <p:cNvPr id="8" name="TextBox 7"/>
-          <p:cNvSpPr txBox="1"/>
-          <p:nvPr/>
-        </p:nvSpPr>
-        <p:spPr>
-          <a:xfrm>
-            <a:off x="1314907" y="2148840"/>
-            <a:ext cx="1773936" cy="640080"/>
-          </a:xfrm>
-          <a:prstGeom prst="rect">
-            <a:avLst/>
-          </a:prstGeom>
-          <a:noFill/>
-        </p:spPr>
-        <p:txBody>
-          <a:bodyPr wrap="square">
-            <a:spAutoFit/>
-          </a:bodyPr>
-          <a:lstStyle/>
-          <a:p>
-            <a:pPr algn="l"/>
-            <a:r>
-              <a:rPr sz="1500" b="1">
-                <a:solidFill>
-                  <a:srgbClr val="14213D"/>
-                </a:solidFill>
-                <a:latin typeface="맑은 고딕"/>
-              </a:rPr>
-              <a:t>① 개념 설명</a:t>
-            </a:r>
-          </a:p>
-        </p:txBody>
-      </p:sp>
-      <p:sp>
-        <p:nvSpPr>
-          <p:cNvPr id="9" name="TextBox 8"/>
-          <p:cNvSpPr txBox="1"/>
-          <p:nvPr/>
-        </p:nvSpPr>
-        <p:spPr>
-          <a:xfrm>
-            <a:off x="1314907" y="2834640"/>
-            <a:ext cx="1773936" cy="548640"/>
-          </a:xfrm>
-          <a:prstGeom prst="rect">
-            <a:avLst/>
-          </a:prstGeom>
-          <a:noFill/>
-        </p:spPr>
-        <p:txBody>
-          <a:bodyPr wrap="square">
-            <a:spAutoFit/>
-          </a:bodyPr>
-          <a:lstStyle/>
-          <a:p>
-            <a:pPr algn="l"/>
-            <a:r>
-              <a:rPr sz="1300" b="0">
-                <a:solidFill>
-                  <a:srgbClr val="0D9488"/>
-                </a:solidFill>
-                <a:latin typeface="맑은 고딕"/>
-              </a:rPr>
-              <a:t>25분</a:t>
-            </a:r>
-          </a:p>
-        </p:txBody>
-      </p:sp>
-      <p:sp>
-        <p:nvSpPr>
-          <p:cNvPr id="10" name="TextBox 9"/>
-          <p:cNvSpPr txBox="1"/>
-          <p:nvPr/>
-        </p:nvSpPr>
-        <p:spPr>
-          <a:xfrm>
-            <a:off x="1314907" y="3566160"/>
-            <a:ext cx="1773936" cy="1188720"/>
-          </a:xfrm>
-          <a:prstGeom prst="rect">
-            <a:avLst/>
-          </a:prstGeom>
-          <a:noFill/>
-        </p:spPr>
-        <p:txBody>
-          <a:bodyPr wrap="square">
-            <a:spAutoFit/>
-          </a:bodyPr>
-          <a:lstStyle/>
-          <a:p>
-            <a:pPr algn="l"/>
-            <a:r>
-              <a:rPr sz="1200" b="0">
-                <a:solidFill>
-                  <a:srgbClr val="222733"/>
-                </a:solidFill>
-                <a:latin typeface="맑은 고딕"/>
-              </a:rPr>
-              <a:t>강의자료 기반 직접 강의</a:t>
-            </a:r>
-          </a:p>
-        </p:txBody>
-      </p:sp>
-      <p:sp>
-        <p:nvSpPr>
-          <p:cNvPr id="11" name="Rectangle 10"/>
+          <p:cNvPr id="7" name="Isosceles Triangle 6"/>
           <p:cNvSpPr/>
           <p:nvPr/>
         </p:nvSpPr>
         <p:spPr>
-          <a:xfrm>
-            <a:off x="3430828" y="3273552"/>
-            <a:ext cx="128016" cy="219456"/>
-          </a:xfrm>
-          <a:prstGeom prst="rect">
+          <a:xfrm rot="5400000">
+            <a:off x="3495751" y="1673352"/>
+            <a:ext cx="146304" cy="146304"/>
+          </a:xfrm>
+          <a:prstGeom prst="triangle">
             <a:avLst/>
           </a:prstGeom>
           <a:solidFill>
@@ -6245,60 +6076,14 @@
       </p:sp>
       <p:sp>
         <p:nvSpPr>
-          <p:cNvPr id="12" name="Rectangle 11"/>
+          <p:cNvPr id="8" name="Rectangle 7"/>
           <p:cNvSpPr/>
           <p:nvPr/>
         </p:nvSpPr>
         <p:spPr>
           <a:xfrm>
-            <a:off x="3763670" y="1828800"/>
-            <a:ext cx="2048256" cy="3108960"/>
-          </a:xfrm>
-          <a:prstGeom prst="rect">
-            <a:avLst/>
-          </a:prstGeom>
-          <a:solidFill>
-            <a:srgbClr val="FFFFFF"/>
-          </a:solidFill>
-          <a:ln>
-            <a:solidFill>
-              <a:srgbClr val="FFFFFF"/>
-            </a:solidFill>
-          </a:ln>
-          <a:effectLst/>
-        </p:spPr>
-        <p:style>
-          <a:lnRef idx="1">
-            <a:schemeClr val="accent1"/>
-          </a:lnRef>
-          <a:fillRef idx="3">
-            <a:schemeClr val="accent1"/>
-          </a:fillRef>
-          <a:effectRef idx="2">
-            <a:schemeClr val="accent1"/>
-          </a:effectRef>
-          <a:fontRef idx="minor">
-            <a:schemeClr val="lt1"/>
-          </a:fontRef>
-        </p:style>
-        <p:txBody>
-          <a:bodyPr rtlCol="0" anchor="ctr"/>
-          <a:lstStyle/>
-          <a:p>
-            <a:pPr algn="ctr"/>
-          </a:p>
-        </p:txBody>
-      </p:sp>
-      <p:sp>
-        <p:nvSpPr>
-          <p:cNvPr id="13" name="Rectangle 12"/>
-          <p:cNvSpPr/>
-          <p:nvPr/>
-        </p:nvSpPr>
-        <p:spPr>
-          <a:xfrm>
-            <a:off x="3763670" y="1828800"/>
-            <a:ext cx="2048256" cy="109728"/>
+            <a:off x="5096865" y="1730959"/>
+            <a:ext cx="1995220" cy="31089"/>
           </a:xfrm>
           <a:prstGeom prst="rect">
             <a:avLst/>
@@ -6335,121 +6120,16 @@
       </p:sp>
       <p:sp>
         <p:nvSpPr>
-          <p:cNvPr id="14" name="TextBox 13"/>
-          <p:cNvSpPr txBox="1"/>
-          <p:nvPr/>
-        </p:nvSpPr>
-        <p:spPr>
-          <a:xfrm>
-            <a:off x="3900830" y="2148840"/>
-            <a:ext cx="1773936" cy="640080"/>
-          </a:xfrm>
-          <a:prstGeom prst="rect">
-            <a:avLst/>
-          </a:prstGeom>
-          <a:noFill/>
-        </p:spPr>
-        <p:txBody>
-          <a:bodyPr wrap="square">
-            <a:spAutoFit/>
-          </a:bodyPr>
-          <a:lstStyle/>
-          <a:p>
-            <a:pPr algn="l"/>
-            <a:r>
-              <a:rPr sz="1500" b="1">
-                <a:solidFill>
-                  <a:srgbClr val="14213D"/>
-                </a:solidFill>
-                <a:latin typeface="맑은 고딕"/>
-              </a:rPr>
-              <a:t>② Killercoda</a:t>
-            </a:r>
-          </a:p>
-        </p:txBody>
-      </p:sp>
-      <p:sp>
-        <p:nvSpPr>
-          <p:cNvPr id="15" name="TextBox 14"/>
-          <p:cNvSpPr txBox="1"/>
-          <p:nvPr/>
-        </p:nvSpPr>
-        <p:spPr>
-          <a:xfrm>
-            <a:off x="3900830" y="2834640"/>
-            <a:ext cx="1773936" cy="548640"/>
-          </a:xfrm>
-          <a:prstGeom prst="rect">
-            <a:avLst/>
-          </a:prstGeom>
-          <a:noFill/>
-        </p:spPr>
-        <p:txBody>
-          <a:bodyPr wrap="square">
-            <a:spAutoFit/>
-          </a:bodyPr>
-          <a:lstStyle/>
-          <a:p>
-            <a:pPr algn="l"/>
-            <a:r>
-              <a:rPr sz="1300" b="0">
-                <a:solidFill>
-                  <a:srgbClr val="0D9488"/>
-                </a:solidFill>
-                <a:latin typeface="맑은 고딕"/>
-              </a:rPr>
-              <a:t>15분</a:t>
-            </a:r>
-          </a:p>
-        </p:txBody>
-      </p:sp>
-      <p:sp>
-        <p:nvSpPr>
-          <p:cNvPr id="16" name="TextBox 15"/>
-          <p:cNvSpPr txBox="1"/>
-          <p:nvPr/>
-        </p:nvSpPr>
-        <p:spPr>
-          <a:xfrm>
-            <a:off x="3900830" y="3566160"/>
-            <a:ext cx="1773936" cy="1188720"/>
-          </a:xfrm>
-          <a:prstGeom prst="rect">
-            <a:avLst/>
-          </a:prstGeom>
-          <a:noFill/>
-        </p:spPr>
-        <p:txBody>
-          <a:bodyPr wrap="square">
-            <a:spAutoFit/>
-          </a:bodyPr>
-          <a:lstStyle/>
-          <a:p>
-            <a:pPr algn="l"/>
-            <a:r>
-              <a:rPr sz="1200" b="0">
-                <a:solidFill>
-                  <a:srgbClr val="222733"/>
-                </a:solidFill>
-                <a:latin typeface="맑은 고딕"/>
-              </a:rPr>
-              <a:t>터미널 기본 명령어 실습</a:t>
-            </a:r>
-          </a:p>
-        </p:txBody>
-      </p:sp>
-      <p:sp>
-        <p:nvSpPr>
-          <p:cNvPr id="17" name="Rectangle 16"/>
+          <p:cNvPr id="9" name="Isosceles Triangle 8"/>
           <p:cNvSpPr/>
           <p:nvPr/>
         </p:nvSpPr>
         <p:spPr>
-          <a:xfrm>
-            <a:off x="6016751" y="3273552"/>
-            <a:ext cx="128016" cy="219456"/>
-          </a:xfrm>
-          <a:prstGeom prst="rect">
+          <a:xfrm rot="5400000">
+            <a:off x="6021324" y="1673352"/>
+            <a:ext cx="146304" cy="146304"/>
+          </a:xfrm>
+          <a:prstGeom prst="triangle">
             <a:avLst/>
           </a:prstGeom>
           <a:solidFill>
@@ -6484,60 +6164,14 @@
       </p:sp>
       <p:sp>
         <p:nvSpPr>
-          <p:cNvPr id="18" name="Rectangle 17"/>
+          <p:cNvPr id="10" name="Rectangle 9"/>
           <p:cNvSpPr/>
           <p:nvPr/>
         </p:nvSpPr>
         <p:spPr>
           <a:xfrm>
-            <a:off x="6349593" y="1828800"/>
-            <a:ext cx="2048256" cy="3108960"/>
-          </a:xfrm>
-          <a:prstGeom prst="rect">
-            <a:avLst/>
-          </a:prstGeom>
-          <a:solidFill>
-            <a:srgbClr val="FFFFFF"/>
-          </a:solidFill>
-          <a:ln>
-            <a:solidFill>
-              <a:srgbClr val="FFFFFF"/>
-            </a:solidFill>
-          </a:ln>
-          <a:effectLst/>
-        </p:spPr>
-        <p:style>
-          <a:lnRef idx="1">
-            <a:schemeClr val="accent1"/>
-          </a:lnRef>
-          <a:fillRef idx="3">
-            <a:schemeClr val="accent1"/>
-          </a:fillRef>
-          <a:effectRef idx="2">
-            <a:schemeClr val="accent1"/>
-          </a:effectRef>
-          <a:fontRef idx="minor">
-            <a:schemeClr val="lt1"/>
-          </a:fontRef>
-        </p:style>
-        <p:txBody>
-          <a:bodyPr rtlCol="0" anchor="ctr"/>
-          <a:lstStyle/>
-          <a:p>
-            <a:pPr algn="ctr"/>
-          </a:p>
-        </p:txBody>
-      </p:sp>
-      <p:sp>
-        <p:nvSpPr>
-          <p:cNvPr id="19" name="Rectangle 18"/>
-          <p:cNvSpPr/>
-          <p:nvPr/>
-        </p:nvSpPr>
-        <p:spPr>
-          <a:xfrm>
-            <a:off x="6349593" y="1828800"/>
-            <a:ext cx="2048256" cy="109728"/>
+            <a:off x="7622438" y="1730959"/>
+            <a:ext cx="1995220" cy="31089"/>
           </a:xfrm>
           <a:prstGeom prst="rect">
             <a:avLst/>
@@ -6574,121 +6208,16 @@
       </p:sp>
       <p:sp>
         <p:nvSpPr>
-          <p:cNvPr id="20" name="TextBox 19"/>
-          <p:cNvSpPr txBox="1"/>
-          <p:nvPr/>
-        </p:nvSpPr>
-        <p:spPr>
-          <a:xfrm>
-            <a:off x="6486753" y="2148840"/>
-            <a:ext cx="1773936" cy="640080"/>
-          </a:xfrm>
-          <a:prstGeom prst="rect">
-            <a:avLst/>
-          </a:prstGeom>
-          <a:noFill/>
-        </p:spPr>
-        <p:txBody>
-          <a:bodyPr wrap="square">
-            <a:spAutoFit/>
-          </a:bodyPr>
-          <a:lstStyle/>
-          <a:p>
-            <a:pPr algn="l"/>
-            <a:r>
-              <a:rPr sz="1500" b="1">
-                <a:solidFill>
-                  <a:srgbClr val="14213D"/>
-                </a:solidFill>
-                <a:latin typeface="맑은 고딕"/>
-              </a:rPr>
-              <a:t>③ VM 안내</a:t>
-            </a:r>
-          </a:p>
-        </p:txBody>
-      </p:sp>
-      <p:sp>
-        <p:nvSpPr>
-          <p:cNvPr id="21" name="TextBox 20"/>
-          <p:cNvSpPr txBox="1"/>
-          <p:nvPr/>
-        </p:nvSpPr>
-        <p:spPr>
-          <a:xfrm>
-            <a:off x="6486753" y="2834640"/>
-            <a:ext cx="1773936" cy="548640"/>
-          </a:xfrm>
-          <a:prstGeom prst="rect">
-            <a:avLst/>
-          </a:prstGeom>
-          <a:noFill/>
-        </p:spPr>
-        <p:txBody>
-          <a:bodyPr wrap="square">
-            <a:spAutoFit/>
-          </a:bodyPr>
-          <a:lstStyle/>
-          <a:p>
-            <a:pPr algn="l"/>
-            <a:r>
-              <a:rPr sz="1300" b="0">
-                <a:solidFill>
-                  <a:srgbClr val="0D9488"/>
-                </a:solidFill>
-                <a:latin typeface="맑은 고딕"/>
-              </a:rPr>
-              <a:t>5분</a:t>
-            </a:r>
-          </a:p>
-        </p:txBody>
-      </p:sp>
-      <p:sp>
-        <p:nvSpPr>
-          <p:cNvPr id="22" name="TextBox 21"/>
-          <p:cNvSpPr txBox="1"/>
-          <p:nvPr/>
-        </p:nvSpPr>
-        <p:spPr>
-          <a:xfrm>
-            <a:off x="6486753" y="3566160"/>
-            <a:ext cx="1773936" cy="1188720"/>
-          </a:xfrm>
-          <a:prstGeom prst="rect">
-            <a:avLst/>
-          </a:prstGeom>
-          <a:noFill/>
-        </p:spPr>
-        <p:txBody>
-          <a:bodyPr wrap="square">
-            <a:spAutoFit/>
-          </a:bodyPr>
-          <a:lstStyle/>
-          <a:p>
-            <a:pPr algn="l"/>
-            <a:r>
-              <a:rPr sz="1200" b="0">
-                <a:solidFill>
-                  <a:srgbClr val="222733"/>
-                </a:solidFill>
-                <a:latin typeface="맑은 고딕"/>
-              </a:rPr>
-              <a:t>0주차 VM 점검</a:t>
-            </a:r>
-          </a:p>
-        </p:txBody>
-      </p:sp>
-      <p:sp>
-        <p:nvSpPr>
-          <p:cNvPr id="23" name="Rectangle 22"/>
+          <p:cNvPr id="11" name="Isosceles Triangle 10"/>
           <p:cNvSpPr/>
           <p:nvPr/>
         </p:nvSpPr>
         <p:spPr>
-          <a:xfrm>
-            <a:off x="8602675" y="3273552"/>
-            <a:ext cx="128016" cy="219456"/>
-          </a:xfrm>
-          <a:prstGeom prst="rect">
+          <a:xfrm rot="5400000">
+            <a:off x="8546896" y="1673352"/>
+            <a:ext cx="146304" cy="146304"/>
+          </a:xfrm>
+          <a:prstGeom prst="triangle">
             <a:avLst/>
           </a:prstGeom>
           <a:solidFill>
@@ -6723,25 +6252,23 @@
       </p:sp>
       <p:sp>
         <p:nvSpPr>
-          <p:cNvPr id="24" name="Rectangle 23"/>
+          <p:cNvPr id="12" name="Oval 11"/>
           <p:cNvSpPr/>
           <p:nvPr/>
         </p:nvSpPr>
         <p:spPr>
           <a:xfrm>
-            <a:off x="8935516" y="1828800"/>
-            <a:ext cx="2048256" cy="3108960"/>
-          </a:xfrm>
-          <a:prstGeom prst="rect">
+            <a:off x="2040940" y="1481328"/>
+            <a:ext cx="530352" cy="530352"/>
+          </a:xfrm>
+          <a:prstGeom prst="ellipse">
             <a:avLst/>
           </a:prstGeom>
           <a:solidFill>
-            <a:srgbClr val="FFFFFF"/>
+            <a:srgbClr val="0D9488"/>
           </a:solidFill>
           <a:ln>
-            <a:solidFill>
-              <a:srgbClr val="FFFFFF"/>
-            </a:solidFill>
+            <a:noFill/>
           </a:ln>
           <a:effectLst/>
         </p:spPr>
@@ -6769,20 +6296,140 @@
       </p:sp>
       <p:sp>
         <p:nvSpPr>
-          <p:cNvPr id="25" name="Rectangle 24"/>
+          <p:cNvPr id="13" name="TextBox 12"/>
+          <p:cNvSpPr txBox="1"/>
+          <p:nvPr/>
+        </p:nvSpPr>
+        <p:spPr>
+          <a:xfrm>
+            <a:off x="2040940" y="1481328"/>
+            <a:ext cx="530352" cy="530352"/>
+          </a:xfrm>
+          <a:prstGeom prst="rect">
+            <a:avLst/>
+          </a:prstGeom>
+          <a:noFill/>
+        </p:spPr>
+        <p:txBody>
+          <a:bodyPr wrap="square" anchor="ctr">
+            <a:spAutoFit/>
+          </a:bodyPr>
+          <a:lstStyle/>
+          <a:p>
+            <a:pPr algn="ctr"/>
+            <a:r>
+              <a:rPr sz="1600" b="1">
+                <a:solidFill>
+                  <a:srgbClr val="FFFFFF"/>
+                </a:solidFill>
+                <a:latin typeface="맑은 고딕"/>
+              </a:rPr>
+              <a:t>1</a:t>
+            </a:r>
+          </a:p>
+        </p:txBody>
+      </p:sp>
+      <p:sp>
+        <p:nvSpPr>
+          <p:cNvPr id="14" name="Rounded Rectangle 13"/>
           <p:cNvSpPr/>
           <p:nvPr/>
         </p:nvSpPr>
         <p:spPr>
           <a:xfrm>
-            <a:off x="8935516" y="1828800"/>
-            <a:ext cx="2048256" cy="109728"/>
-          </a:xfrm>
-          <a:prstGeom prst="rect">
-            <a:avLst/>
+            <a:off x="1263700" y="2304288"/>
+            <a:ext cx="2084831" cy="2880360"/>
+          </a:xfrm>
+          <a:prstGeom prst="roundRect">
+            <a:avLst>
+              <a:gd name="adj" fmla="val 6000"/>
+            </a:avLst>
           </a:prstGeom>
           <a:solidFill>
-            <a:srgbClr val="14B8A6"/>
+            <a:srgbClr val="FFFFFF"/>
+          </a:solidFill>
+          <a:ln w="12700">
+            <a:solidFill>
+              <a:srgbClr val="E3E7EE"/>
+            </a:solidFill>
+          </a:ln>
+          <a:effectLst/>
+        </p:spPr>
+        <p:style>
+          <a:lnRef idx="1">
+            <a:schemeClr val="accent1"/>
+          </a:lnRef>
+          <a:fillRef idx="3">
+            <a:schemeClr val="accent1"/>
+          </a:fillRef>
+          <a:effectRef idx="2">
+            <a:schemeClr val="accent1"/>
+          </a:effectRef>
+          <a:fontRef idx="minor">
+            <a:schemeClr val="lt1"/>
+          </a:fontRef>
+        </p:style>
+        <p:txBody>
+          <a:bodyPr rtlCol="0" anchor="ctr"/>
+          <a:lstStyle/>
+          <a:p>
+            <a:pPr algn="ctr"/>
+          </a:p>
+        </p:txBody>
+      </p:sp>
+      <p:sp>
+        <p:nvSpPr>
+          <p:cNvPr id="15" name="TextBox 14"/>
+          <p:cNvSpPr txBox="1"/>
+          <p:nvPr/>
+        </p:nvSpPr>
+        <p:spPr>
+          <a:xfrm>
+            <a:off x="1428292" y="2487168"/>
+            <a:ext cx="1755648" cy="548640"/>
+          </a:xfrm>
+          <a:prstGeom prst="rect">
+            <a:avLst/>
+          </a:prstGeom>
+          <a:noFill/>
+        </p:spPr>
+        <p:txBody>
+          <a:bodyPr wrap="square">
+            <a:spAutoFit/>
+          </a:bodyPr>
+          <a:lstStyle/>
+          <a:p>
+            <a:pPr algn="l"/>
+            <a:r>
+              <a:rPr sz="1500" b="1">
+                <a:solidFill>
+                  <a:srgbClr val="14213D"/>
+                </a:solidFill>
+                <a:latin typeface="맑은 고딕"/>
+              </a:rPr>
+              <a:t>개념 설명</a:t>
+            </a:r>
+          </a:p>
+        </p:txBody>
+      </p:sp>
+      <p:sp>
+        <p:nvSpPr>
+          <p:cNvPr id="16" name="Rounded Rectangle 15"/>
+          <p:cNvSpPr/>
+          <p:nvPr/>
+        </p:nvSpPr>
+        <p:spPr>
+          <a:xfrm>
+            <a:off x="1428292" y="3017520"/>
+            <a:ext cx="521208" cy="310896"/>
+          </a:xfrm>
+          <a:prstGeom prst="roundRect">
+            <a:avLst>
+              <a:gd name="adj" fmla="val 50000"/>
+            </a:avLst>
+          </a:prstGeom>
+          <a:solidFill>
+            <a:srgbClr val="E3F5F3"/>
           </a:solidFill>
           <a:ln>
             <a:noFill/>
@@ -6813,14 +6460,49 @@
       </p:sp>
       <p:sp>
         <p:nvSpPr>
-          <p:cNvPr id="26" name="TextBox 25"/>
+          <p:cNvPr id="17" name="TextBox 16"/>
           <p:cNvSpPr txBox="1"/>
           <p:nvPr/>
         </p:nvSpPr>
         <p:spPr>
           <a:xfrm>
-            <a:off x="9072676" y="2148840"/>
-            <a:ext cx="1773936" cy="640080"/>
+            <a:off x="1428292" y="3017520"/>
+            <a:ext cx="521208" cy="310896"/>
+          </a:xfrm>
+          <a:prstGeom prst="rect">
+            <a:avLst/>
+          </a:prstGeom>
+          <a:noFill/>
+        </p:spPr>
+        <p:txBody>
+          <a:bodyPr wrap="square" anchor="ctr">
+            <a:spAutoFit/>
+          </a:bodyPr>
+          <a:lstStyle/>
+          <a:p>
+            <a:pPr algn="ctr"/>
+            <a:r>
+              <a:rPr sz="1200" b="1">
+                <a:solidFill>
+                  <a:srgbClr val="0D9488"/>
+                </a:solidFill>
+                <a:latin typeface="맑은 고딕"/>
+              </a:rPr>
+              <a:t>25분</a:t>
+            </a:r>
+          </a:p>
+        </p:txBody>
+      </p:sp>
+      <p:sp>
+        <p:nvSpPr>
+          <p:cNvPr id="18" name="TextBox 17"/>
+          <p:cNvSpPr txBox="1"/>
+          <p:nvPr/>
+        </p:nvSpPr>
+        <p:spPr>
+          <a:xfrm>
+            <a:off x="1428292" y="3474720"/>
+            <a:ext cx="1755648" cy="1572768"/>
           </a:xfrm>
           <a:prstGeom prst="rect">
             <a:avLst/>
@@ -6833,29 +6515,160 @@
           </a:bodyPr>
           <a:lstStyle/>
           <a:p>
-            <a:pPr algn="l"/>
-            <a:r>
-              <a:rPr sz="1500" b="1">
-                <a:solidFill>
-                  <a:srgbClr val="14213D"/>
-                </a:solidFill>
-                <a:latin typeface="맑은 고딕"/>
-              </a:rPr>
-              <a:t>④ 결과 제출</a:t>
-            </a:r>
-          </a:p>
-        </p:txBody>
-      </p:sp>
-      <p:sp>
-        <p:nvSpPr>
-          <p:cNvPr id="27" name="TextBox 26"/>
+            <a:pPr algn="l">
+              <a:lnSpc>
+                <a:spcPct val="115000"/>
+              </a:lnSpc>
+            </a:pPr>
+            <a:r>
+              <a:rPr sz="1200" b="0">
+                <a:solidFill>
+                  <a:srgbClr val="222733"/>
+                </a:solidFill>
+                <a:latin typeface="맑은 고딕"/>
+              </a:rPr>
+              <a:t>강의자료 기반 직접 강의</a:t>
+            </a:r>
+          </a:p>
+        </p:txBody>
+      </p:sp>
+      <p:sp>
+        <p:nvSpPr>
+          <p:cNvPr id="19" name="Oval 18"/>
+          <p:cNvSpPr/>
+          <p:nvPr/>
+        </p:nvSpPr>
+        <p:spPr>
+          <a:xfrm>
+            <a:off x="4566513" y="1481328"/>
+            <a:ext cx="530352" cy="530352"/>
+          </a:xfrm>
+          <a:prstGeom prst="ellipse">
+            <a:avLst/>
+          </a:prstGeom>
+          <a:solidFill>
+            <a:srgbClr val="0D9488"/>
+          </a:solidFill>
+          <a:ln>
+            <a:noFill/>
+          </a:ln>
+          <a:effectLst/>
+        </p:spPr>
+        <p:style>
+          <a:lnRef idx="1">
+            <a:schemeClr val="accent1"/>
+          </a:lnRef>
+          <a:fillRef idx="3">
+            <a:schemeClr val="accent1"/>
+          </a:fillRef>
+          <a:effectRef idx="2">
+            <a:schemeClr val="accent1"/>
+          </a:effectRef>
+          <a:fontRef idx="minor">
+            <a:schemeClr val="lt1"/>
+          </a:fontRef>
+        </p:style>
+        <p:txBody>
+          <a:bodyPr rtlCol="0" anchor="ctr"/>
+          <a:lstStyle/>
+          <a:p>
+            <a:pPr algn="ctr"/>
+          </a:p>
+        </p:txBody>
+      </p:sp>
+      <p:sp>
+        <p:nvSpPr>
+          <p:cNvPr id="20" name="TextBox 19"/>
           <p:cNvSpPr txBox="1"/>
           <p:nvPr/>
         </p:nvSpPr>
         <p:spPr>
           <a:xfrm>
-            <a:off x="9072676" y="2834640"/>
-            <a:ext cx="1773936" cy="548640"/>
+            <a:off x="4566513" y="1481328"/>
+            <a:ext cx="530352" cy="530352"/>
+          </a:xfrm>
+          <a:prstGeom prst="rect">
+            <a:avLst/>
+          </a:prstGeom>
+          <a:noFill/>
+        </p:spPr>
+        <p:txBody>
+          <a:bodyPr wrap="square" anchor="ctr">
+            <a:spAutoFit/>
+          </a:bodyPr>
+          <a:lstStyle/>
+          <a:p>
+            <a:pPr algn="ctr"/>
+            <a:r>
+              <a:rPr sz="1600" b="1">
+                <a:solidFill>
+                  <a:srgbClr val="FFFFFF"/>
+                </a:solidFill>
+                <a:latin typeface="맑은 고딕"/>
+              </a:rPr>
+              <a:t>2</a:t>
+            </a:r>
+          </a:p>
+        </p:txBody>
+      </p:sp>
+      <p:sp>
+        <p:nvSpPr>
+          <p:cNvPr id="21" name="Rounded Rectangle 20"/>
+          <p:cNvSpPr/>
+          <p:nvPr/>
+        </p:nvSpPr>
+        <p:spPr>
+          <a:xfrm>
+            <a:off x="3789273" y="2304288"/>
+            <a:ext cx="2084831" cy="2880360"/>
+          </a:xfrm>
+          <a:prstGeom prst="roundRect">
+            <a:avLst>
+              <a:gd name="adj" fmla="val 6000"/>
+            </a:avLst>
+          </a:prstGeom>
+          <a:solidFill>
+            <a:srgbClr val="FFFFFF"/>
+          </a:solidFill>
+          <a:ln w="12700">
+            <a:solidFill>
+              <a:srgbClr val="E3E7EE"/>
+            </a:solidFill>
+          </a:ln>
+          <a:effectLst/>
+        </p:spPr>
+        <p:style>
+          <a:lnRef idx="1">
+            <a:schemeClr val="accent1"/>
+          </a:lnRef>
+          <a:fillRef idx="3">
+            <a:schemeClr val="accent1"/>
+          </a:fillRef>
+          <a:effectRef idx="2">
+            <a:schemeClr val="accent1"/>
+          </a:effectRef>
+          <a:fontRef idx="minor">
+            <a:schemeClr val="lt1"/>
+          </a:fontRef>
+        </p:style>
+        <p:txBody>
+          <a:bodyPr rtlCol="0" anchor="ctr"/>
+          <a:lstStyle/>
+          <a:p>
+            <a:pPr algn="ctr"/>
+          </a:p>
+        </p:txBody>
+      </p:sp>
+      <p:sp>
+        <p:nvSpPr>
+          <p:cNvPr id="22" name="TextBox 21"/>
+          <p:cNvSpPr txBox="1"/>
+          <p:nvPr/>
+        </p:nvSpPr>
+        <p:spPr>
+          <a:xfrm>
+            <a:off x="3953865" y="2487168"/>
+            <a:ext cx="1755648" cy="548640"/>
           </a:xfrm>
           <a:prstGeom prst="rect">
             <a:avLst/>
@@ -6870,27 +6683,108 @@
           <a:p>
             <a:pPr algn="l"/>
             <a:r>
-              <a:rPr sz="1300" b="0">
+              <a:rPr sz="1500" b="1">
+                <a:solidFill>
+                  <a:srgbClr val="14213D"/>
+                </a:solidFill>
+                <a:latin typeface="맑은 고딕"/>
+              </a:rPr>
+              <a:t>Killercoda</a:t>
+            </a:r>
+          </a:p>
+        </p:txBody>
+      </p:sp>
+      <p:sp>
+        <p:nvSpPr>
+          <p:cNvPr id="23" name="Rounded Rectangle 22"/>
+          <p:cNvSpPr/>
+          <p:nvPr/>
+        </p:nvSpPr>
+        <p:spPr>
+          <a:xfrm>
+            <a:off x="3953865" y="3017520"/>
+            <a:ext cx="521208" cy="310896"/>
+          </a:xfrm>
+          <a:prstGeom prst="roundRect">
+            <a:avLst>
+              <a:gd name="adj" fmla="val 50000"/>
+            </a:avLst>
+          </a:prstGeom>
+          <a:solidFill>
+            <a:srgbClr val="E3F5F3"/>
+          </a:solidFill>
+          <a:ln>
+            <a:noFill/>
+          </a:ln>
+          <a:effectLst/>
+        </p:spPr>
+        <p:style>
+          <a:lnRef idx="1">
+            <a:schemeClr val="accent1"/>
+          </a:lnRef>
+          <a:fillRef idx="3">
+            <a:schemeClr val="accent1"/>
+          </a:fillRef>
+          <a:effectRef idx="2">
+            <a:schemeClr val="accent1"/>
+          </a:effectRef>
+          <a:fontRef idx="minor">
+            <a:schemeClr val="lt1"/>
+          </a:fontRef>
+        </p:style>
+        <p:txBody>
+          <a:bodyPr rtlCol="0" anchor="ctr"/>
+          <a:lstStyle/>
+          <a:p>
+            <a:pPr algn="ctr"/>
+          </a:p>
+        </p:txBody>
+      </p:sp>
+      <p:sp>
+        <p:nvSpPr>
+          <p:cNvPr id="24" name="TextBox 23"/>
+          <p:cNvSpPr txBox="1"/>
+          <p:nvPr/>
+        </p:nvSpPr>
+        <p:spPr>
+          <a:xfrm>
+            <a:off x="3953865" y="3017520"/>
+            <a:ext cx="521208" cy="310896"/>
+          </a:xfrm>
+          <a:prstGeom prst="rect">
+            <a:avLst/>
+          </a:prstGeom>
+          <a:noFill/>
+        </p:spPr>
+        <p:txBody>
+          <a:bodyPr wrap="square" anchor="ctr">
+            <a:spAutoFit/>
+          </a:bodyPr>
+          <a:lstStyle/>
+          <a:p>
+            <a:pPr algn="ctr"/>
+            <a:r>
+              <a:rPr sz="1200" b="1">
                 <a:solidFill>
                   <a:srgbClr val="0D9488"/>
                 </a:solidFill>
                 <a:latin typeface="맑은 고딕"/>
               </a:rPr>
-              <a:t>5분</a:t>
-            </a:r>
-          </a:p>
-        </p:txBody>
-      </p:sp>
-      <p:sp>
-        <p:nvSpPr>
-          <p:cNvPr id="28" name="TextBox 27"/>
+              <a:t>15분</a:t>
+            </a:r>
+          </a:p>
+        </p:txBody>
+      </p:sp>
+      <p:sp>
+        <p:nvSpPr>
+          <p:cNvPr id="25" name="TextBox 24"/>
           <p:cNvSpPr txBox="1"/>
           <p:nvPr/>
         </p:nvSpPr>
         <p:spPr>
           <a:xfrm>
-            <a:off x="9072676" y="3566160"/>
-            <a:ext cx="1773936" cy="1188720"/>
+            <a:off x="3953865" y="3474720"/>
+            <a:ext cx="1755648" cy="1572768"/>
           </a:xfrm>
           <a:prstGeom prst="rect">
             <a:avLst/>
@@ -6903,7 +6797,11 @@
           </a:bodyPr>
           <a:lstStyle/>
           <a:p>
-            <a:pPr algn="l"/>
+            <a:pPr algn="l">
+              <a:lnSpc>
+                <a:spcPct val="115000"/>
+              </a:lnSpc>
+            </a:pPr>
             <a:r>
               <a:rPr sz="1200" b="0">
                 <a:solidFill>
@@ -6911,8 +6809,135 @@
                 </a:solidFill>
                 <a:latin typeface="맑은 고딕"/>
               </a:rPr>
-              <a:t>체크리스트 제출</a:t>
-            </a:r>
+              <a:t>터미널 기본 명령어 실습</a:t>
+            </a:r>
+          </a:p>
+        </p:txBody>
+      </p:sp>
+      <p:sp>
+        <p:nvSpPr>
+          <p:cNvPr id="26" name="Oval 25"/>
+          <p:cNvSpPr/>
+          <p:nvPr/>
+        </p:nvSpPr>
+        <p:spPr>
+          <a:xfrm>
+            <a:off x="7092086" y="1481328"/>
+            <a:ext cx="530352" cy="530352"/>
+          </a:xfrm>
+          <a:prstGeom prst="ellipse">
+            <a:avLst/>
+          </a:prstGeom>
+          <a:solidFill>
+            <a:srgbClr val="0D9488"/>
+          </a:solidFill>
+          <a:ln>
+            <a:noFill/>
+          </a:ln>
+          <a:effectLst/>
+        </p:spPr>
+        <p:style>
+          <a:lnRef idx="1">
+            <a:schemeClr val="accent1"/>
+          </a:lnRef>
+          <a:fillRef idx="3">
+            <a:schemeClr val="accent1"/>
+          </a:fillRef>
+          <a:effectRef idx="2">
+            <a:schemeClr val="accent1"/>
+          </a:effectRef>
+          <a:fontRef idx="minor">
+            <a:schemeClr val="lt1"/>
+          </a:fontRef>
+        </p:style>
+        <p:txBody>
+          <a:bodyPr rtlCol="0" anchor="ctr"/>
+          <a:lstStyle/>
+          <a:p>
+            <a:pPr algn="ctr"/>
+          </a:p>
+        </p:txBody>
+      </p:sp>
+      <p:sp>
+        <p:nvSpPr>
+          <p:cNvPr id="27" name="TextBox 26"/>
+          <p:cNvSpPr txBox="1"/>
+          <p:nvPr/>
+        </p:nvSpPr>
+        <p:spPr>
+          <a:xfrm>
+            <a:off x="7092086" y="1481328"/>
+            <a:ext cx="530352" cy="530352"/>
+          </a:xfrm>
+          <a:prstGeom prst="rect">
+            <a:avLst/>
+          </a:prstGeom>
+          <a:noFill/>
+        </p:spPr>
+        <p:txBody>
+          <a:bodyPr wrap="square" anchor="ctr">
+            <a:spAutoFit/>
+          </a:bodyPr>
+          <a:lstStyle/>
+          <a:p>
+            <a:pPr algn="ctr"/>
+            <a:r>
+              <a:rPr sz="1600" b="1">
+                <a:solidFill>
+                  <a:srgbClr val="FFFFFF"/>
+                </a:solidFill>
+                <a:latin typeface="맑은 고딕"/>
+              </a:rPr>
+              <a:t>3</a:t>
+            </a:r>
+          </a:p>
+        </p:txBody>
+      </p:sp>
+      <p:sp>
+        <p:nvSpPr>
+          <p:cNvPr id="28" name="Rounded Rectangle 27"/>
+          <p:cNvSpPr/>
+          <p:nvPr/>
+        </p:nvSpPr>
+        <p:spPr>
+          <a:xfrm>
+            <a:off x="6314846" y="2304288"/>
+            <a:ext cx="2084831" cy="2880360"/>
+          </a:xfrm>
+          <a:prstGeom prst="roundRect">
+            <a:avLst>
+              <a:gd name="adj" fmla="val 6000"/>
+            </a:avLst>
+          </a:prstGeom>
+          <a:solidFill>
+            <a:srgbClr val="FFFFFF"/>
+          </a:solidFill>
+          <a:ln w="12700">
+            <a:solidFill>
+              <a:srgbClr val="E3E7EE"/>
+            </a:solidFill>
+          </a:ln>
+          <a:effectLst/>
+        </p:spPr>
+        <p:style>
+          <a:lnRef idx="1">
+            <a:schemeClr val="accent1"/>
+          </a:lnRef>
+          <a:fillRef idx="3">
+            <a:schemeClr val="accent1"/>
+          </a:fillRef>
+          <a:effectRef idx="2">
+            <a:schemeClr val="accent1"/>
+          </a:effectRef>
+          <a:fontRef idx="minor">
+            <a:schemeClr val="lt1"/>
+          </a:fontRef>
+        </p:style>
+        <p:txBody>
+          <a:bodyPr rtlCol="0" anchor="ctr"/>
+          <a:lstStyle/>
+          <a:p>
+            <a:pPr algn="ctr"/>
           </a:p>
         </p:txBody>
       </p:sp>
@@ -6924,8 +6949,8 @@
         </p:nvSpPr>
         <p:spPr>
           <a:xfrm>
-            <a:off x="457200" y="6528816"/>
-            <a:ext cx="7315200" cy="274320"/>
+            <a:off x="6479438" y="2487168"/>
+            <a:ext cx="1755648" cy="548640"/>
           </a:xfrm>
           <a:prstGeom prst="rect">
             <a:avLst/>
@@ -6940,27 +6965,108 @@
           <a:p>
             <a:pPr algn="l"/>
             <a:r>
-              <a:rPr sz="900" b="0">
-                <a:solidFill>
-                  <a:srgbClr val="5B6373"/>
-                </a:solidFill>
-                <a:latin typeface="맑은 고딕"/>
-              </a:rPr>
-              <a:t>클라우드인프라관리  ·  1주차 1차시</a:t>
-            </a:r>
-          </a:p>
-        </p:txBody>
-      </p:sp>
-      <p:sp>
-        <p:nvSpPr>
-          <p:cNvPr id="30" name="TextBox 29"/>
+              <a:rPr sz="1500" b="1">
+                <a:solidFill>
+                  <a:srgbClr val="14213D"/>
+                </a:solidFill>
+                <a:latin typeface="맑은 고딕"/>
+              </a:rPr>
+              <a:t>VM 안내</a:t>
+            </a:r>
+          </a:p>
+        </p:txBody>
+      </p:sp>
+      <p:sp>
+        <p:nvSpPr>
+          <p:cNvPr id="30" name="Rounded Rectangle 29"/>
+          <p:cNvSpPr/>
+          <p:nvPr/>
+        </p:nvSpPr>
+        <p:spPr>
+          <a:xfrm>
+            <a:off x="6479438" y="3017520"/>
+            <a:ext cx="420623" cy="310896"/>
+          </a:xfrm>
+          <a:prstGeom prst="roundRect">
+            <a:avLst>
+              <a:gd name="adj" fmla="val 50000"/>
+            </a:avLst>
+          </a:prstGeom>
+          <a:solidFill>
+            <a:srgbClr val="E3F5F3"/>
+          </a:solidFill>
+          <a:ln>
+            <a:noFill/>
+          </a:ln>
+          <a:effectLst/>
+        </p:spPr>
+        <p:style>
+          <a:lnRef idx="1">
+            <a:schemeClr val="accent1"/>
+          </a:lnRef>
+          <a:fillRef idx="3">
+            <a:schemeClr val="accent1"/>
+          </a:fillRef>
+          <a:effectRef idx="2">
+            <a:schemeClr val="accent1"/>
+          </a:effectRef>
+          <a:fontRef idx="minor">
+            <a:schemeClr val="lt1"/>
+          </a:fontRef>
+        </p:style>
+        <p:txBody>
+          <a:bodyPr rtlCol="0" anchor="ctr"/>
+          <a:lstStyle/>
+          <a:p>
+            <a:pPr algn="ctr"/>
+          </a:p>
+        </p:txBody>
+      </p:sp>
+      <p:sp>
+        <p:nvSpPr>
+          <p:cNvPr id="31" name="TextBox 30"/>
           <p:cNvSpPr txBox="1"/>
           <p:nvPr/>
         </p:nvSpPr>
         <p:spPr>
           <a:xfrm>
-            <a:off x="10607040" y="6528816"/>
-            <a:ext cx="1188720" cy="274320"/>
+            <a:off x="6479438" y="3017520"/>
+            <a:ext cx="420623" cy="310896"/>
+          </a:xfrm>
+          <a:prstGeom prst="rect">
+            <a:avLst/>
+          </a:prstGeom>
+          <a:noFill/>
+        </p:spPr>
+        <p:txBody>
+          <a:bodyPr wrap="square" anchor="ctr">
+            <a:spAutoFit/>
+          </a:bodyPr>
+          <a:lstStyle/>
+          <a:p>
+            <a:pPr algn="ctr"/>
+            <a:r>
+              <a:rPr sz="1200" b="1">
+                <a:solidFill>
+                  <a:srgbClr val="0D9488"/>
+                </a:solidFill>
+                <a:latin typeface="맑은 고딕"/>
+              </a:rPr>
+              <a:t>5분</a:t>
+            </a:r>
+          </a:p>
+        </p:txBody>
+      </p:sp>
+      <p:sp>
+        <p:nvSpPr>
+          <p:cNvPr id="32" name="TextBox 31"/>
+          <p:cNvSpPr txBox="1"/>
+          <p:nvPr/>
+        </p:nvSpPr>
+        <p:spPr>
+          <a:xfrm>
+            <a:off x="6479438" y="3474720"/>
+            <a:ext cx="1755648" cy="1572768"/>
           </a:xfrm>
           <a:prstGeom prst="rect">
             <a:avLst/>
@@ -6973,14 +7079,370 @@
           </a:bodyPr>
           <a:lstStyle/>
           <a:p>
+            <a:pPr algn="l">
+              <a:lnSpc>
+                <a:spcPct val="115000"/>
+              </a:lnSpc>
+            </a:pPr>
+            <a:r>
+              <a:rPr sz="1200" b="0">
+                <a:solidFill>
+                  <a:srgbClr val="222733"/>
+                </a:solidFill>
+                <a:latin typeface="맑은 고딕"/>
+              </a:rPr>
+              <a:t>0주차 VM 점검</a:t>
+            </a:r>
+          </a:p>
+        </p:txBody>
+      </p:sp>
+      <p:sp>
+        <p:nvSpPr>
+          <p:cNvPr id="33" name="Oval 32"/>
+          <p:cNvSpPr/>
+          <p:nvPr/>
+        </p:nvSpPr>
+        <p:spPr>
+          <a:xfrm>
+            <a:off x="9617659" y="1481328"/>
+            <a:ext cx="530352" cy="530352"/>
+          </a:xfrm>
+          <a:prstGeom prst="ellipse">
+            <a:avLst/>
+          </a:prstGeom>
+          <a:solidFill>
+            <a:srgbClr val="0D9488"/>
+          </a:solidFill>
+          <a:ln>
+            <a:noFill/>
+          </a:ln>
+          <a:effectLst/>
+        </p:spPr>
+        <p:style>
+          <a:lnRef idx="1">
+            <a:schemeClr val="accent1"/>
+          </a:lnRef>
+          <a:fillRef idx="3">
+            <a:schemeClr val="accent1"/>
+          </a:fillRef>
+          <a:effectRef idx="2">
+            <a:schemeClr val="accent1"/>
+          </a:effectRef>
+          <a:fontRef idx="minor">
+            <a:schemeClr val="lt1"/>
+          </a:fontRef>
+        </p:style>
+        <p:txBody>
+          <a:bodyPr rtlCol="0" anchor="ctr"/>
+          <a:lstStyle/>
+          <a:p>
+            <a:pPr algn="ctr"/>
+          </a:p>
+        </p:txBody>
+      </p:sp>
+      <p:sp>
+        <p:nvSpPr>
+          <p:cNvPr id="34" name="TextBox 33"/>
+          <p:cNvSpPr txBox="1"/>
+          <p:nvPr/>
+        </p:nvSpPr>
+        <p:spPr>
+          <a:xfrm>
+            <a:off x="9617659" y="1481328"/>
+            <a:ext cx="530352" cy="530352"/>
+          </a:xfrm>
+          <a:prstGeom prst="rect">
+            <a:avLst/>
+          </a:prstGeom>
+          <a:noFill/>
+        </p:spPr>
+        <p:txBody>
+          <a:bodyPr wrap="square" anchor="ctr">
+            <a:spAutoFit/>
+          </a:bodyPr>
+          <a:lstStyle/>
+          <a:p>
+            <a:pPr algn="ctr"/>
+            <a:r>
+              <a:rPr sz="1600" b="1">
+                <a:solidFill>
+                  <a:srgbClr val="FFFFFF"/>
+                </a:solidFill>
+                <a:latin typeface="맑은 고딕"/>
+              </a:rPr>
+              <a:t>4</a:t>
+            </a:r>
+          </a:p>
+        </p:txBody>
+      </p:sp>
+      <p:sp>
+        <p:nvSpPr>
+          <p:cNvPr id="35" name="Rounded Rectangle 34"/>
+          <p:cNvSpPr/>
+          <p:nvPr/>
+        </p:nvSpPr>
+        <p:spPr>
+          <a:xfrm>
+            <a:off x="8840419" y="2304288"/>
+            <a:ext cx="2084831" cy="2880360"/>
+          </a:xfrm>
+          <a:prstGeom prst="roundRect">
+            <a:avLst>
+              <a:gd name="adj" fmla="val 6000"/>
+            </a:avLst>
+          </a:prstGeom>
+          <a:solidFill>
+            <a:srgbClr val="FFFFFF"/>
+          </a:solidFill>
+          <a:ln w="12700">
+            <a:solidFill>
+              <a:srgbClr val="E3E7EE"/>
+            </a:solidFill>
+          </a:ln>
+          <a:effectLst/>
+        </p:spPr>
+        <p:style>
+          <a:lnRef idx="1">
+            <a:schemeClr val="accent1"/>
+          </a:lnRef>
+          <a:fillRef idx="3">
+            <a:schemeClr val="accent1"/>
+          </a:fillRef>
+          <a:effectRef idx="2">
+            <a:schemeClr val="accent1"/>
+          </a:effectRef>
+          <a:fontRef idx="minor">
+            <a:schemeClr val="lt1"/>
+          </a:fontRef>
+        </p:style>
+        <p:txBody>
+          <a:bodyPr rtlCol="0" anchor="ctr"/>
+          <a:lstStyle/>
+          <a:p>
+            <a:pPr algn="ctr"/>
+          </a:p>
+        </p:txBody>
+      </p:sp>
+      <p:sp>
+        <p:nvSpPr>
+          <p:cNvPr id="36" name="TextBox 35"/>
+          <p:cNvSpPr txBox="1"/>
+          <p:nvPr/>
+        </p:nvSpPr>
+        <p:spPr>
+          <a:xfrm>
+            <a:off x="9005011" y="2487168"/>
+            <a:ext cx="1755648" cy="548640"/>
+          </a:xfrm>
+          <a:prstGeom prst="rect">
+            <a:avLst/>
+          </a:prstGeom>
+          <a:noFill/>
+        </p:spPr>
+        <p:txBody>
+          <a:bodyPr wrap="square">
+            <a:spAutoFit/>
+          </a:bodyPr>
+          <a:lstStyle/>
+          <a:p>
             <a:pPr algn="l"/>
             <a:r>
+              <a:rPr sz="1500" b="1">
+                <a:solidFill>
+                  <a:srgbClr val="14213D"/>
+                </a:solidFill>
+                <a:latin typeface="맑은 고딕"/>
+              </a:rPr>
+              <a:t>결과 제출</a:t>
+            </a:r>
+          </a:p>
+        </p:txBody>
+      </p:sp>
+      <p:sp>
+        <p:nvSpPr>
+          <p:cNvPr id="37" name="Rounded Rectangle 36"/>
+          <p:cNvSpPr/>
+          <p:nvPr/>
+        </p:nvSpPr>
+        <p:spPr>
+          <a:xfrm>
+            <a:off x="9005011" y="3017520"/>
+            <a:ext cx="420623" cy="310896"/>
+          </a:xfrm>
+          <a:prstGeom prst="roundRect">
+            <a:avLst>
+              <a:gd name="adj" fmla="val 50000"/>
+            </a:avLst>
+          </a:prstGeom>
+          <a:solidFill>
+            <a:srgbClr val="E3F5F3"/>
+          </a:solidFill>
+          <a:ln>
+            <a:noFill/>
+          </a:ln>
+          <a:effectLst/>
+        </p:spPr>
+        <p:style>
+          <a:lnRef idx="1">
+            <a:schemeClr val="accent1"/>
+          </a:lnRef>
+          <a:fillRef idx="3">
+            <a:schemeClr val="accent1"/>
+          </a:fillRef>
+          <a:effectRef idx="2">
+            <a:schemeClr val="accent1"/>
+          </a:effectRef>
+          <a:fontRef idx="minor">
+            <a:schemeClr val="lt1"/>
+          </a:fontRef>
+        </p:style>
+        <p:txBody>
+          <a:bodyPr rtlCol="0" anchor="ctr"/>
+          <a:lstStyle/>
+          <a:p>
+            <a:pPr algn="ctr"/>
+          </a:p>
+        </p:txBody>
+      </p:sp>
+      <p:sp>
+        <p:nvSpPr>
+          <p:cNvPr id="38" name="TextBox 37"/>
+          <p:cNvSpPr txBox="1"/>
+          <p:nvPr/>
+        </p:nvSpPr>
+        <p:spPr>
+          <a:xfrm>
+            <a:off x="9005011" y="3017520"/>
+            <a:ext cx="420623" cy="310896"/>
+          </a:xfrm>
+          <a:prstGeom prst="rect">
+            <a:avLst/>
+          </a:prstGeom>
+          <a:noFill/>
+        </p:spPr>
+        <p:txBody>
+          <a:bodyPr wrap="square" anchor="ctr">
+            <a:spAutoFit/>
+          </a:bodyPr>
+          <a:lstStyle/>
+          <a:p>
+            <a:pPr algn="ctr"/>
+            <a:r>
+              <a:rPr sz="1200" b="1">
+                <a:solidFill>
+                  <a:srgbClr val="0D9488"/>
+                </a:solidFill>
+                <a:latin typeface="맑은 고딕"/>
+              </a:rPr>
+              <a:t>5분</a:t>
+            </a:r>
+          </a:p>
+        </p:txBody>
+      </p:sp>
+      <p:sp>
+        <p:nvSpPr>
+          <p:cNvPr id="39" name="TextBox 38"/>
+          <p:cNvSpPr txBox="1"/>
+          <p:nvPr/>
+        </p:nvSpPr>
+        <p:spPr>
+          <a:xfrm>
+            <a:off x="9005011" y="3474720"/>
+            <a:ext cx="1755648" cy="1572768"/>
+          </a:xfrm>
+          <a:prstGeom prst="rect">
+            <a:avLst/>
+          </a:prstGeom>
+          <a:noFill/>
+        </p:spPr>
+        <p:txBody>
+          <a:bodyPr wrap="square">
+            <a:spAutoFit/>
+          </a:bodyPr>
+          <a:lstStyle/>
+          <a:p>
+            <a:pPr algn="l">
+              <a:lnSpc>
+                <a:spcPct val="115000"/>
+              </a:lnSpc>
+            </a:pPr>
+            <a:r>
+              <a:rPr sz="1200" b="0">
+                <a:solidFill>
+                  <a:srgbClr val="222733"/>
+                </a:solidFill>
+                <a:latin typeface="맑은 고딕"/>
+              </a:rPr>
+              <a:t>체크리스트 제출</a:t>
+            </a:r>
+          </a:p>
+        </p:txBody>
+      </p:sp>
+      <p:sp>
+        <p:nvSpPr>
+          <p:cNvPr id="40" name="TextBox 39"/>
+          <p:cNvSpPr txBox="1"/>
+          <p:nvPr/>
+        </p:nvSpPr>
+        <p:spPr>
+          <a:xfrm>
+            <a:off x="457200" y="6528816"/>
+            <a:ext cx="7315200" cy="274320"/>
+          </a:xfrm>
+          <a:prstGeom prst="rect">
+            <a:avLst/>
+          </a:prstGeom>
+          <a:noFill/>
+        </p:spPr>
+        <p:txBody>
+          <a:bodyPr wrap="square">
+            <a:spAutoFit/>
+          </a:bodyPr>
+          <a:lstStyle/>
+          <a:p>
+            <a:pPr algn="l"/>
+            <a:r>
               <a:rPr sz="900" b="0">
                 <a:solidFill>
                   <a:srgbClr val="5B6373"/>
                 </a:solidFill>
                 <a:latin typeface="맑은 고딕"/>
               </a:rPr>
+              <a:t>클라우드인프라관리  ·  1주차 1차시</a:t>
+            </a:r>
+          </a:p>
+        </p:txBody>
+      </p:sp>
+      <p:sp>
+        <p:nvSpPr>
+          <p:cNvPr id="41" name="TextBox 40"/>
+          <p:cNvSpPr txBox="1"/>
+          <p:nvPr/>
+        </p:nvSpPr>
+        <p:spPr>
+          <a:xfrm>
+            <a:off x="10607040" y="6528816"/>
+            <a:ext cx="1188720" cy="274320"/>
+          </a:xfrm>
+          <a:prstGeom prst="rect">
+            <a:avLst/>
+          </a:prstGeom>
+          <a:noFill/>
+        </p:spPr>
+        <p:txBody>
+          <a:bodyPr wrap="square">
+            <a:spAutoFit/>
+          </a:bodyPr>
+          <a:lstStyle/>
+          <a:p>
+            <a:pPr algn="l"/>
+            <a:r>
+              <a:rPr sz="900" b="0">
+                <a:solidFill>
+                  <a:srgbClr val="5B6373"/>
+                </a:solidFill>
+                <a:latin typeface="맑은 고딕"/>
+              </a:rPr>
               <a:t>03 / 14</a:t>
             </a:r>
           </a:p>
@@ -6988,7 +7450,7 @@
       </p:sp>
       <p:sp>
         <p:nvSpPr>
-          <p:cNvPr id="31" name="Rectangle 30"/>
+          <p:cNvPr id="42" name="Rectangle 41"/>
           <p:cNvSpPr/>
           <p:nvPr/>
         </p:nvSpPr>
